--- a/Springboard/Captsone 3 - Cancer Image Classification/Problem Statement - Capstone 3 - Histology Slide Cancer Categorization.pptx
+++ b/Springboard/Captsone 3 - Cancer Image Classification/Problem Statement - Capstone 3 - Histology Slide Cancer Categorization.pptx
@@ -116,12 +116,33 @@
 </p:presentation>
 </file>
 
-<file path=ppt/revisionInfo.xml><?xml version="1.0" encoding="utf-8"?>
-<p1510:revInfo xmlns:a="http://schemas.openxmlformats.org/drawingml/2006/main" xmlns:r="http://schemas.openxmlformats.org/officeDocument/2006/relationships" xmlns:p1510="http://schemas.microsoft.com/office/powerpoint/2015/10/main">
-  <p1510:revLst>
-    <p1510:client id="{98A05853-D620-4533-9B2A-7713E80D9FCD}" v="3" dt="2026-03-18T18:37:37.782"/>
-  </p1510:revLst>
-</p1510:revInfo>
+<file path=ppt/changesInfos/changesInfo1.xml><?xml version="1.0" encoding="utf-8"?>
+<pc:chgInfo xmlns:a="http://schemas.openxmlformats.org/drawingml/2006/main" xmlns:r="http://schemas.openxmlformats.org/officeDocument/2006/relationships" xmlns:ac="http://schemas.microsoft.com/office/drawing/2013/main/command" xmlns:pc="http://schemas.microsoft.com/office/powerpoint/2013/main/command">
+  <pc:docChgLst>
+    <pc:chgData name="Benjamin Peters" userId="83763c400eb8b5dd" providerId="LiveId" clId="{7AE7A208-551F-4015-BAFA-D67B1C1DCA48}"/>
+    <pc:docChg chg="modSld">
+      <pc:chgData name="Benjamin Peters" userId="83763c400eb8b5dd" providerId="LiveId" clId="{7AE7A208-551F-4015-BAFA-D67B1C1DCA48}" dt="2026-03-25T20:18:19.560" v="370" actId="20577"/>
+      <pc:docMkLst>
+        <pc:docMk/>
+      </pc:docMkLst>
+      <pc:sldChg chg="modSp mod">
+        <pc:chgData name="Benjamin Peters" userId="83763c400eb8b5dd" providerId="LiveId" clId="{7AE7A208-551F-4015-BAFA-D67B1C1DCA48}" dt="2026-03-25T20:18:19.560" v="370" actId="20577"/>
+        <pc:sldMkLst>
+          <pc:docMk/>
+          <pc:sldMk cId="1793042987" sldId="260"/>
+        </pc:sldMkLst>
+        <pc:spChg chg="mod">
+          <ac:chgData name="Benjamin Peters" userId="83763c400eb8b5dd" providerId="LiveId" clId="{7AE7A208-551F-4015-BAFA-D67B1C1DCA48}" dt="2026-03-25T20:18:19.560" v="370" actId="20577"/>
+          <ac:spMkLst>
+            <pc:docMk/>
+            <pc:sldMk cId="1793042987" sldId="260"/>
+            <ac:spMk id="58" creationId="{4CE43150-AE31-F77C-BFCC-44D58FFAF92D}"/>
+          </ac:spMkLst>
+        </pc:spChg>
+      </pc:sldChg>
+    </pc:docChg>
+  </pc:docChgLst>
+</pc:chgInfo>
 </file>
 
 <file path=ppt/notesMasters/notesMaster1.xml><?xml version="1.0" encoding="utf-8"?>
@@ -206,7 +227,7 @@
           <a:p>
             <a:fld id="{A74A9663-9441-46D8-B21B-00BF361335DE}" type="datetimeFigureOut">
               <a:rPr lang="en-US" smtClean="0"/>
-              <a:t>3/18/2026</a:t>
+              <a:t>3/21/2026</a:t>
             </a:fld>
             <a:endParaRPr lang="en-US"/>
           </a:p>
@@ -1738,7 +1759,7 @@
           <a:p>
             <a:fld id="{733F02CF-2A44-443D-BAEB-FBF496450064}" type="datetimeFigureOut">
               <a:rPr lang="en-US" smtClean="0"/>
-              <a:t>3/18/2026</a:t>
+              <a:t>3/21/2026</a:t>
             </a:fld>
             <a:endParaRPr lang="en-US"/>
           </a:p>
@@ -1936,7 +1957,7 @@
           <a:p>
             <a:fld id="{733F02CF-2A44-443D-BAEB-FBF496450064}" type="datetimeFigureOut">
               <a:rPr lang="en-US" smtClean="0"/>
-              <a:t>3/18/2026</a:t>
+              <a:t>3/21/2026</a:t>
             </a:fld>
             <a:endParaRPr lang="en-US"/>
           </a:p>
@@ -2144,7 +2165,7 @@
           <a:p>
             <a:fld id="{733F02CF-2A44-443D-BAEB-FBF496450064}" type="datetimeFigureOut">
               <a:rPr lang="en-US" smtClean="0"/>
-              <a:t>3/18/2026</a:t>
+              <a:t>3/21/2026</a:t>
             </a:fld>
             <a:endParaRPr lang="en-US"/>
           </a:p>
@@ -2532,7 +2553,7 @@
           <a:p>
             <a:fld id="{733F02CF-2A44-443D-BAEB-FBF496450064}" type="datetimeFigureOut">
               <a:rPr lang="en-US" smtClean="0"/>
-              <a:t>3/18/2026</a:t>
+              <a:t>3/21/2026</a:t>
             </a:fld>
             <a:endParaRPr lang="en-US"/>
           </a:p>
@@ -2807,7 +2828,7 @@
           <a:p>
             <a:fld id="{733F02CF-2A44-443D-BAEB-FBF496450064}" type="datetimeFigureOut">
               <a:rPr lang="en-US" smtClean="0"/>
-              <a:t>3/18/2026</a:t>
+              <a:t>3/21/2026</a:t>
             </a:fld>
             <a:endParaRPr lang="en-US"/>
           </a:p>
@@ -3072,7 +3093,7 @@
           <a:p>
             <a:fld id="{733F02CF-2A44-443D-BAEB-FBF496450064}" type="datetimeFigureOut">
               <a:rPr lang="en-US" smtClean="0"/>
-              <a:t>3/18/2026</a:t>
+              <a:t>3/21/2026</a:t>
             </a:fld>
             <a:endParaRPr lang="en-US"/>
           </a:p>
@@ -3484,7 +3505,7 @@
           <a:p>
             <a:fld id="{733F02CF-2A44-443D-BAEB-FBF496450064}" type="datetimeFigureOut">
               <a:rPr lang="en-US" smtClean="0"/>
-              <a:t>3/18/2026</a:t>
+              <a:t>3/21/2026</a:t>
             </a:fld>
             <a:endParaRPr lang="en-US"/>
           </a:p>
@@ -3625,7 +3646,7 @@
           <a:p>
             <a:fld id="{733F02CF-2A44-443D-BAEB-FBF496450064}" type="datetimeFigureOut">
               <a:rPr lang="en-US" smtClean="0"/>
-              <a:t>3/18/2026</a:t>
+              <a:t>3/21/2026</a:t>
             </a:fld>
             <a:endParaRPr lang="en-US"/>
           </a:p>
@@ -3738,7 +3759,7 @@
           <a:p>
             <a:fld id="{733F02CF-2A44-443D-BAEB-FBF496450064}" type="datetimeFigureOut">
               <a:rPr lang="en-US" smtClean="0"/>
-              <a:t>3/18/2026</a:t>
+              <a:t>3/21/2026</a:t>
             </a:fld>
             <a:endParaRPr lang="en-US"/>
           </a:p>
@@ -4049,7 +4070,7 @@
           <a:p>
             <a:fld id="{733F02CF-2A44-443D-BAEB-FBF496450064}" type="datetimeFigureOut">
               <a:rPr lang="en-US" smtClean="0"/>
-              <a:t>3/18/2026</a:t>
+              <a:t>3/21/2026</a:t>
             </a:fld>
             <a:endParaRPr lang="en-US"/>
           </a:p>
@@ -4337,7 +4358,7 @@
           <a:p>
             <a:fld id="{733F02CF-2A44-443D-BAEB-FBF496450064}" type="datetimeFigureOut">
               <a:rPr lang="en-US" smtClean="0"/>
-              <a:t>3/18/2026</a:t>
+              <a:t>3/21/2026</a:t>
             </a:fld>
             <a:endParaRPr lang="en-US"/>
           </a:p>
@@ -4578,7 +4599,7 @@
           <a:p>
             <a:fld id="{733F02CF-2A44-443D-BAEB-FBF496450064}" type="datetimeFigureOut">
               <a:rPr lang="en-US" smtClean="0"/>
-              <a:t>3/18/2026</a:t>
+              <a:t>3/21/2026</a:t>
             </a:fld>
             <a:endParaRPr lang="en-US"/>
           </a:p>
@@ -7192,7 +7213,7 @@
               <a:buChar char="•"/>
             </a:pPr>
             <a:r>
-              <a:rPr lang="en-AU" sz="1070" dirty="0">
+              <a:rPr lang="en-US" sz="1070" dirty="0">
                 <a:solidFill>
                   <a:srgbClr val="000000"/>
                 </a:solidFill>
@@ -7201,7 +7222,7 @@
                 <a:cs typeface="Arial"/>
                 <a:sym typeface="Arial"/>
               </a:rPr>
-              <a:t>The data available for free is limited. This may affect may bias any conclusions</a:t>
+              <a:t>The data includes images of cancer where the cancer is limited to the center of the image. This may not always be the case in practice.</a:t>
             </a:r>
             <a:endParaRPr dirty="0"/>
           </a:p>
@@ -7215,7 +7236,7 @@
               <a:buChar char="•"/>
             </a:pPr>
             <a:r>
-              <a:rPr lang="en-AU" sz="1070" dirty="0">
+              <a:rPr lang="en-US" sz="1070" dirty="0">
                 <a:solidFill>
                   <a:srgbClr val="000000"/>
                 </a:solidFill>
@@ -7224,46 +7245,7 @@
                 <a:cs typeface="Arial"/>
                 <a:sym typeface="Arial"/>
               </a:rPr>
-              <a:t>The data has limited/no historical data so the analysis will be primarily limited to the current houses for sale. </a:t>
-            </a:r>
-            <a:endParaRPr dirty="0"/>
-          </a:p>
-          <a:p>
-            <a:pPr marL="171450" indent="-171450">
-              <a:buClr>
-                <a:srgbClr val="000000"/>
-              </a:buClr>
-              <a:buSzPts val="1070"/>
-              <a:buFont typeface="Arial"/>
-              <a:buChar char="•"/>
-            </a:pPr>
-            <a:r>
-              <a:rPr lang="en-AU" sz="1070" dirty="0">
-                <a:solidFill>
-                  <a:srgbClr val="000000"/>
-                </a:solidFill>
-                <a:latin typeface="Arial"/>
-                <a:ea typeface="Arial"/>
-                <a:cs typeface="Arial"/>
-                <a:sym typeface="Arial"/>
-              </a:rPr>
-              <a:t>The data will be limited to </a:t>
-            </a:r>
-            <a:r>
-              <a:rPr lang="en-AU" sz="1070" dirty="0"/>
-              <a:t>Minnesota</a:t>
-            </a:r>
-            <a:r>
-              <a:rPr lang="en-AU" sz="1070" dirty="0">
-                <a:solidFill>
-                  <a:srgbClr val="000000"/>
-                </a:solidFill>
-                <a:latin typeface="Arial"/>
-                <a:ea typeface="Arial"/>
-                <a:cs typeface="Arial"/>
-                <a:sym typeface="Arial"/>
-              </a:rPr>
-              <a:t> to limit complicating factors from different state laws and regulations. </a:t>
+              <a:t>Time will be a very large constraint as this data will take much longer than other sets to model</a:t>
             </a:r>
             <a:endParaRPr sz="1070" dirty="0">
               <a:solidFill>
